--- a/textbook/ppt/chapter09_ppt.pptx
+++ b/textbook/ppt/chapter09_ppt.pptx
@@ -7,6 +7,12 @@
   <p:sldIdLst>
     <p:sldId id="256" r:id="rId7"/>
     <p:sldId id="257" r:id="rId8"/>
+    <p:sldId id="258" r:id="rId9"/>
+    <p:sldId id="259" r:id="rId10"/>
+    <p:sldId id="260" r:id="rId11"/>
+    <p:sldId id="261" r:id="rId12"/>
+    <p:sldId id="262" r:id="rId13"/>
+    <p:sldId id="263" r:id="rId14"/>
   </p:sldIdLst>
   <p:sldSz cx="12188952" cy="6858000" type="screen4x3"/>
   <p:notesSz cx="6858000" cy="9144000"/>
@@ -3229,6 +3235,638 @@
             <a:r>
               <a:rPr sz="1800"/>
               <a:t>• 浮点二分的基本概念与应用</a:t>
+            </a:r>
+          </a:p>
+        </p:txBody>
+      </p:sp>
+    </p:spTree>
+  </p:cSld>
+  <p:clrMapOvr>
+    <a:masterClrMapping/>
+  </p:clrMapOvr>
+</p:sld>
+</file>
+
+<file path=ppt/slides/slide3.xml><?xml version="1.0" encoding="utf-8"?>
+<p:sld xmlns:a="http://schemas.openxmlformats.org/drawingml/2006/main" xmlns:p="http://schemas.openxmlformats.org/presentationml/2006/main" xmlns:r="http://schemas.openxmlformats.org/officeDocument/2006/relationships">
+  <p:cSld>
+    <p:spTree>
+      <p:nvGrpSpPr>
+        <p:cNvPr id="1" name=""/>
+        <p:cNvGrpSpPr/>
+        <p:nvPr/>
+      </p:nvGrpSpPr>
+      <p:grpSpPr/>
+      <p:sp>
+        <p:nvSpPr>
+          <p:cNvPr id="2" name="TextBox 1"/>
+          <p:cNvSpPr txBox="1"/>
+          <p:nvPr/>
+        </p:nvSpPr>
+        <p:spPr>
+          <a:xfrm>
+            <a:off x="914400" y="457200"/>
+            <a:ext cx="10058400" cy="914400"/>
+          </a:xfrm>
+          <a:prstGeom prst="rect">
+            <a:avLst/>
+          </a:prstGeom>
+          <a:noFill/>
+        </p:spPr>
+        <p:txBody>
+          <a:bodyPr wrap="none">
+            <a:spAutoFit/>
+          </a:bodyPr>
+          <a:lstStyle/>
+          <a:p>
+            <a:r>
+              <a:rPr sz="2800" b="1">
+                <a:solidFill>
+                  <a:srgbClr val="8B0000"/>
+                </a:solidFill>
+              </a:rPr>
+              <a:t>本章概览</a:t>
+            </a:r>
+          </a:p>
+        </p:txBody>
+      </p:sp>
+      <p:sp>
+        <p:nvSpPr>
+          <p:cNvPr id="3" name="TextBox 2"/>
+          <p:cNvSpPr txBox="1"/>
+          <p:nvPr/>
+        </p:nvSpPr>
+        <p:spPr>
+          <a:xfrm>
+            <a:off x="914400" y="1371600"/>
+            <a:ext cx="10058400" cy="5029200"/>
+          </a:xfrm>
+          <a:prstGeom prst="rect">
+            <a:avLst/>
+          </a:prstGeom>
+          <a:noFill/>
+        </p:spPr>
+        <p:txBody>
+          <a:bodyPr wrap="none">
+            <a:spAutoFit/>
+          </a:bodyPr>
+          <a:lstStyle/>
+          <a:p/>
+          <a:p>
+            <a:r>
+              <a:rPr sz="1600">
+                <a:solidFill>
+                  <a:srgbClr val="000000"/>
+                </a:solidFill>
+              </a:rPr>
+              <a:t>快速排序：选基准，分区，递归 O(nlogn)</a:t>
+            </a:r>
+          </a:p>
+          <a:p>
+            <a:r>
+              <a:rPr sz="1600">
+                <a:solidFill>
+                  <a:srgbClr val="000000"/>
+                </a:solidFill>
+              </a:rPr>
+              <a:t>归并排序：分而治之，合并有序数组 O(nlogn)</a:t>
+            </a:r>
+          </a:p>
+          <a:p>
+            <a:r>
+              <a:rPr sz="1600">
+                <a:solidFill>
+                  <a:srgbClr val="000000"/>
+                </a:solidFill>
+              </a:rPr>
+              <a:t>二分查找：有序数组中找目标 O(logn)</a:t>
+            </a:r>
+          </a:p>
+          <a:p>
+            <a:r>
+              <a:rPr sz="1600">
+                <a:solidFill>
+                  <a:srgbClr val="000000"/>
+                </a:solidFill>
+              </a:rPr>
+              <a:t>浮点二分：精度控制</a:t>
+            </a:r>
+          </a:p>
+        </p:txBody>
+      </p:sp>
+    </p:spTree>
+  </p:cSld>
+  <p:clrMapOvr>
+    <a:masterClrMapping/>
+  </p:clrMapOvr>
+</p:sld>
+</file>
+
+<file path=ppt/slides/slide4.xml><?xml version="1.0" encoding="utf-8"?>
+<p:sld xmlns:a="http://schemas.openxmlformats.org/drawingml/2006/main" xmlns:p="http://schemas.openxmlformats.org/presentationml/2006/main" xmlns:r="http://schemas.openxmlformats.org/officeDocument/2006/relationships">
+  <p:cSld>
+    <p:spTree>
+      <p:nvGrpSpPr>
+        <p:cNvPr id="1" name=""/>
+        <p:cNvGrpSpPr/>
+        <p:nvPr/>
+      </p:nvGrpSpPr>
+      <p:grpSpPr/>
+      <p:sp>
+        <p:nvSpPr>
+          <p:cNvPr id="2" name="TextBox 1"/>
+          <p:cNvSpPr txBox="1"/>
+          <p:nvPr/>
+        </p:nvSpPr>
+        <p:spPr>
+          <a:xfrm>
+            <a:off x="914400" y="457200"/>
+            <a:ext cx="10058400" cy="914400"/>
+          </a:xfrm>
+          <a:prstGeom prst="rect">
+            <a:avLst/>
+          </a:prstGeom>
+          <a:noFill/>
+        </p:spPr>
+        <p:txBody>
+          <a:bodyPr wrap="none">
+            <a:spAutoFit/>
+          </a:bodyPr>
+          <a:lstStyle/>
+          <a:p>
+            <a:r>
+              <a:rPr sz="2800" b="1">
+                <a:solidFill>
+                  <a:srgbClr val="8B0000"/>
+                </a:solidFill>
+              </a:rPr>
+              <a:t>C++ 代码示例</a:t>
+            </a:r>
+          </a:p>
+        </p:txBody>
+      </p:sp>
+      <p:sp>
+        <p:nvSpPr>
+          <p:cNvPr id="3" name="TextBox 2"/>
+          <p:cNvSpPr txBox="1"/>
+          <p:nvPr/>
+        </p:nvSpPr>
+        <p:spPr>
+          <a:xfrm>
+            <a:off x="914400" y="1371600"/>
+            <a:ext cx="10058400" cy="5029200"/>
+          </a:xfrm>
+          <a:prstGeom prst="rect">
+            <a:avLst/>
+          </a:prstGeom>
+          <a:noFill/>
+        </p:spPr>
+        <p:txBody>
+          <a:bodyPr wrap="none">
+            <a:spAutoFit/>
+          </a:bodyPr>
+          <a:lstStyle/>
+          <a:p/>
+          <a:p>
+            <a:r>
+              <a:rPr sz="1400">
+                <a:solidFill>
+                  <a:srgbClr val="000000"/>
+                </a:solidFill>
+              </a:rPr>
+              <a:t>int binary_search(int a[], int n, int x) {
+    int l = 0, r = n-1;
+    while (l &lt;= r) {
+        int mid = (l + r) &gt;&gt; 1;
+        if (a[mid] == x) return mid;
+        else if (a[mid] &lt; x) l = mid + 1;
+        else r = mid - 1;
+    }
+    return -1;
+}</a:t>
+            </a:r>
+          </a:p>
+        </p:txBody>
+      </p:sp>
+    </p:spTree>
+  </p:cSld>
+  <p:clrMapOvr>
+    <a:masterClrMapping/>
+  </p:clrMapOvr>
+</p:sld>
+</file>
+
+<file path=ppt/slides/slide5.xml><?xml version="1.0" encoding="utf-8"?>
+<p:sld xmlns:a="http://schemas.openxmlformats.org/drawingml/2006/main" xmlns:p="http://schemas.openxmlformats.org/presentationml/2006/main" xmlns:r="http://schemas.openxmlformats.org/officeDocument/2006/relationships">
+  <p:cSld>
+    <p:spTree>
+      <p:nvGrpSpPr>
+        <p:cNvPr id="1" name=""/>
+        <p:cNvGrpSpPr/>
+        <p:nvPr/>
+      </p:nvGrpSpPr>
+      <p:grpSpPr/>
+      <p:sp>
+        <p:nvSpPr>
+          <p:cNvPr id="2" name="TextBox 1"/>
+          <p:cNvSpPr txBox="1"/>
+          <p:nvPr/>
+        </p:nvSpPr>
+        <p:spPr>
+          <a:xfrm>
+            <a:off x="914400" y="457200"/>
+            <a:ext cx="10058400" cy="914400"/>
+          </a:xfrm>
+          <a:prstGeom prst="rect">
+            <a:avLst/>
+          </a:prstGeom>
+          <a:noFill/>
+        </p:spPr>
+        <p:txBody>
+          <a:bodyPr wrap="none">
+            <a:spAutoFit/>
+          </a:bodyPr>
+          <a:lstStyle/>
+          <a:p>
+            <a:r>
+              <a:rPr sz="2800" b="1">
+                <a:solidFill>
+                  <a:srgbClr val="8B0000"/>
+                </a:solidFill>
+              </a:rPr>
+              <a:t>Python 代码示例</a:t>
+            </a:r>
+          </a:p>
+        </p:txBody>
+      </p:sp>
+      <p:sp>
+        <p:nvSpPr>
+          <p:cNvPr id="3" name="TextBox 2"/>
+          <p:cNvSpPr txBox="1"/>
+          <p:nvPr/>
+        </p:nvSpPr>
+        <p:spPr>
+          <a:xfrm>
+            <a:off x="914400" y="1371600"/>
+            <a:ext cx="10058400" cy="5029200"/>
+          </a:xfrm>
+          <a:prstGeom prst="rect">
+            <a:avLst/>
+          </a:prstGeom>
+          <a:noFill/>
+        </p:spPr>
+        <p:txBody>
+          <a:bodyPr wrap="none">
+            <a:spAutoFit/>
+          </a:bodyPr>
+          <a:lstStyle/>
+          <a:p/>
+          <a:p>
+            <a:r>
+              <a:rPr sz="1400">
+                <a:solidFill>
+                  <a:srgbClr val="000000"/>
+                </a:solidFill>
+              </a:rPr>
+              <a:t>import bisect
+idx = bisect.bisect_left(a, x)
+if idx &lt; len(a) and a[idx] == x:
+    return idx</a:t>
+            </a:r>
+          </a:p>
+        </p:txBody>
+      </p:sp>
+    </p:spTree>
+  </p:cSld>
+  <p:clrMapOvr>
+    <a:masterClrMapping/>
+  </p:clrMapOvr>
+</p:sld>
+</file>
+
+<file path=ppt/slides/slide6.xml><?xml version="1.0" encoding="utf-8"?>
+<p:sld xmlns:a="http://schemas.openxmlformats.org/drawingml/2006/main" xmlns:p="http://schemas.openxmlformats.org/presentationml/2006/main" xmlns:r="http://schemas.openxmlformats.org/officeDocument/2006/relationships">
+  <p:cSld>
+    <p:spTree>
+      <p:nvGrpSpPr>
+        <p:cNvPr id="1" name=""/>
+        <p:cNvGrpSpPr/>
+        <p:nvPr/>
+      </p:nvGrpSpPr>
+      <p:grpSpPr/>
+      <p:sp>
+        <p:nvSpPr>
+          <p:cNvPr id="2" name="TextBox 1"/>
+          <p:cNvSpPr txBox="1"/>
+          <p:nvPr/>
+        </p:nvSpPr>
+        <p:spPr>
+          <a:xfrm>
+            <a:off x="914400" y="457200"/>
+            <a:ext cx="10058400" cy="914400"/>
+          </a:xfrm>
+          <a:prstGeom prst="rect">
+            <a:avLst/>
+          </a:prstGeom>
+          <a:noFill/>
+        </p:spPr>
+        <p:txBody>
+          <a:bodyPr wrap="none">
+            <a:spAutoFit/>
+          </a:bodyPr>
+          <a:lstStyle/>
+          <a:p>
+            <a:r>
+              <a:rPr sz="2800" b="1">
+                <a:solidFill>
+                  <a:srgbClr val="8B0000"/>
+                </a:solidFill>
+              </a:rPr>
+              <a:t>常见错误</a:t>
+            </a:r>
+          </a:p>
+        </p:txBody>
+      </p:sp>
+      <p:sp>
+        <p:nvSpPr>
+          <p:cNvPr id="3" name="TextBox 2"/>
+          <p:cNvSpPr txBox="1"/>
+          <p:nvPr/>
+        </p:nvSpPr>
+        <p:spPr>
+          <a:xfrm>
+            <a:off x="914400" y="1371600"/>
+            <a:ext cx="10058400" cy="5029200"/>
+          </a:xfrm>
+          <a:prstGeom prst="rect">
+            <a:avLst/>
+          </a:prstGeom>
+          <a:noFill/>
+        </p:spPr>
+        <p:txBody>
+          <a:bodyPr wrap="none">
+            <a:spAutoFit/>
+          </a:bodyPr>
+          <a:lstStyle/>
+          <a:p/>
+          <a:p>
+            <a:r>
+              <a:rPr sz="1600">
+                <a:solidFill>
+                  <a:srgbClr val="000000"/>
+                </a:solidFill>
+              </a:rPr>
+              <a:t>mid = (l+r)/2 可能溢出</a:t>
+            </a:r>
+          </a:p>
+          <a:p>
+            <a:r>
+              <a:rPr sz="1600">
+                <a:solidFill>
+                  <a:srgbClr val="000000"/>
+                </a:solidFill>
+              </a:rPr>
+              <a:t>二分边界：l&lt;r vs l&lt;=r</a:t>
+            </a:r>
+          </a:p>
+          <a:p>
+            <a:r>
+              <a:rPr sz="1600">
+                <a:solidFill>
+                  <a:srgbClr val="000000"/>
+                </a:solidFill>
+              </a:rPr>
+              <a:t>浮点二分精度：while(r-l&gt;1e-8)</a:t>
+            </a:r>
+          </a:p>
+          <a:p>
+            <a:r>
+              <a:rPr sz="1600">
+                <a:solidFill>
+                  <a:srgbClr val="000000"/>
+                </a:solidFill>
+              </a:rPr>
+              <a:t>排序稳定性区别</a:t>
+            </a:r>
+          </a:p>
+        </p:txBody>
+      </p:sp>
+    </p:spTree>
+  </p:cSld>
+  <p:clrMapOvr>
+    <a:masterClrMapping/>
+  </p:clrMapOvr>
+</p:sld>
+</file>
+
+<file path=ppt/slides/slide7.xml><?xml version="1.0" encoding="utf-8"?>
+<p:sld xmlns:a="http://schemas.openxmlformats.org/drawingml/2006/main" xmlns:p="http://schemas.openxmlformats.org/presentationml/2006/main" xmlns:r="http://schemas.openxmlformats.org/officeDocument/2006/relationships">
+  <p:cSld>
+    <p:spTree>
+      <p:nvGrpSpPr>
+        <p:cNvPr id="1" name=""/>
+        <p:cNvGrpSpPr/>
+        <p:nvPr/>
+      </p:nvGrpSpPr>
+      <p:grpSpPr/>
+      <p:sp>
+        <p:nvSpPr>
+          <p:cNvPr id="2" name="TextBox 1"/>
+          <p:cNvSpPr txBox="1"/>
+          <p:nvPr/>
+        </p:nvSpPr>
+        <p:spPr>
+          <a:xfrm>
+            <a:off x="914400" y="457200"/>
+            <a:ext cx="10058400" cy="914400"/>
+          </a:xfrm>
+          <a:prstGeom prst="rect">
+            <a:avLst/>
+          </a:prstGeom>
+          <a:noFill/>
+        </p:spPr>
+        <p:txBody>
+          <a:bodyPr wrap="none">
+            <a:spAutoFit/>
+          </a:bodyPr>
+          <a:lstStyle/>
+          <a:p>
+            <a:r>
+              <a:rPr sz="2800" b="1">
+                <a:solidFill>
+                  <a:srgbClr val="8B0000"/>
+                </a:solidFill>
+              </a:rPr>
+              <a:t>练习题目</a:t>
+            </a:r>
+          </a:p>
+        </p:txBody>
+      </p:sp>
+      <p:sp>
+        <p:nvSpPr>
+          <p:cNvPr id="3" name="TextBox 2"/>
+          <p:cNvSpPr txBox="1"/>
+          <p:nvPr/>
+        </p:nvSpPr>
+        <p:spPr>
+          <a:xfrm>
+            <a:off x="914400" y="1371600"/>
+            <a:ext cx="10058400" cy="5029200"/>
+          </a:xfrm>
+          <a:prstGeom prst="rect">
+            <a:avLst/>
+          </a:prstGeom>
+          <a:noFill/>
+        </p:spPr>
+        <p:txBody>
+          <a:bodyPr wrap="none">
+            <a:spAutoFit/>
+          </a:bodyPr>
+          <a:lstStyle/>
+          <a:p/>
+          <a:p>
+            <a:r>
+              <a:rPr sz="1600">
+                <a:solidFill>
+                  <a:srgbClr val="000000"/>
+                </a:solidFill>
+              </a:rPr>
+              <a:t>JD103 快剑排序</a:t>
+            </a:r>
+          </a:p>
+          <a:p>
+            <a:r>
+              <a:rPr sz="1600">
+                <a:solidFill>
+                  <a:srgbClr val="000000"/>
+                </a:solidFill>
+              </a:rPr>
+              <a:t>JD107 石壁听风</a:t>
+            </a:r>
+          </a:p>
+          <a:p>
+            <a:r>
+              <a:rPr sz="1600">
+                <a:solidFill>
+                  <a:srgbClr val="000000"/>
+                </a:solidFill>
+              </a:rPr>
+              <a:t>JD108 剑指方根</a:t>
+            </a:r>
+          </a:p>
+        </p:txBody>
+      </p:sp>
+    </p:spTree>
+  </p:cSld>
+  <p:clrMapOvr>
+    <a:masterClrMapping/>
+  </p:clrMapOvr>
+</p:sld>
+</file>
+
+<file path=ppt/slides/slide8.xml><?xml version="1.0" encoding="utf-8"?>
+<p:sld xmlns:a="http://schemas.openxmlformats.org/drawingml/2006/main" xmlns:p="http://schemas.openxmlformats.org/presentationml/2006/main" xmlns:r="http://schemas.openxmlformats.org/officeDocument/2006/relationships">
+  <p:cSld>
+    <p:spTree>
+      <p:nvGrpSpPr>
+        <p:cNvPr id="1" name=""/>
+        <p:cNvGrpSpPr/>
+        <p:nvPr/>
+      </p:nvGrpSpPr>
+      <p:grpSpPr/>
+      <p:sp>
+        <p:nvSpPr>
+          <p:cNvPr id="2" name="TextBox 1"/>
+          <p:cNvSpPr txBox="1"/>
+          <p:nvPr/>
+        </p:nvSpPr>
+        <p:spPr>
+          <a:xfrm>
+            <a:off x="914400" y="457200"/>
+            <a:ext cx="10058400" cy="914400"/>
+          </a:xfrm>
+          <a:prstGeom prst="rect">
+            <a:avLst/>
+          </a:prstGeom>
+          <a:noFill/>
+        </p:spPr>
+        <p:txBody>
+          <a:bodyPr wrap="none">
+            <a:spAutoFit/>
+          </a:bodyPr>
+          <a:lstStyle/>
+          <a:p>
+            <a:r>
+              <a:rPr sz="2800" b="1">
+                <a:solidFill>
+                  <a:srgbClr val="8B0000"/>
+                </a:solidFill>
+              </a:rPr>
+              <a:t>本章小结</a:t>
+            </a:r>
+          </a:p>
+        </p:txBody>
+      </p:sp>
+      <p:sp>
+        <p:nvSpPr>
+          <p:cNvPr id="3" name="TextBox 2"/>
+          <p:cNvSpPr txBox="1"/>
+          <p:nvPr/>
+        </p:nvSpPr>
+        <p:spPr>
+          <a:xfrm>
+            <a:off x="914400" y="1371600"/>
+            <a:ext cx="10058400" cy="5029200"/>
+          </a:xfrm>
+          <a:prstGeom prst="rect">
+            <a:avLst/>
+          </a:prstGeom>
+          <a:noFill/>
+        </p:spPr>
+        <p:txBody>
+          <a:bodyPr wrap="none">
+            <a:spAutoFit/>
+          </a:bodyPr>
+          <a:lstStyle/>
+          <a:p/>
+          <a:p>
+            <a:r>
+              <a:rPr sz="1600">
+                <a:solidFill>
+                  <a:srgbClr val="000000"/>
+                </a:solidFill>
+              </a:rPr>
+              <a:t>掌握核心概念</a:t>
+            </a:r>
+          </a:p>
+          <a:p>
+            <a:r>
+              <a:rPr sz="1600">
+                <a:solidFill>
+                  <a:srgbClr val="000000"/>
+                </a:solidFill>
+              </a:rPr>
+              <a:t>多做练习</a:t>
+            </a:r>
+          </a:p>
+          <a:p>
+            <a:r>
+              <a:rPr sz="1600">
+                <a:solidFill>
+                  <a:srgbClr val="000000"/>
+                </a:solidFill>
+              </a:rPr>
+              <a:t>注意边界条件</a:t>
+            </a:r>
+          </a:p>
+          <a:p>
+            <a:r>
+              <a:rPr sz="1600">
+                <a:solidFill>
+                  <a:srgbClr val="000000"/>
+                </a:solidFill>
+              </a:rPr>
+              <a:t>理解算法思想而非死记代码</a:t>
             </a:r>
           </a:p>
         </p:txBody>

--- a/textbook/ppt/chapter09_ppt.pptx
+++ b/textbook/ppt/chapter09_ppt.pptx
@@ -12,7 +12,6 @@
     <p:sldId id="260" r:id="rId11"/>
     <p:sldId id="261" r:id="rId12"/>
     <p:sldId id="262" r:id="rId13"/>
-    <p:sldId id="263" r:id="rId14"/>
   </p:sldIdLst>
   <p:sldSz cx="12188952" cy="6858000" type="screen4x3"/>
   <p:notesSz cx="6858000" cy="9144000"/>
@@ -3124,18 +3123,7 @@
                   <a:srgbClr val="8B0000"/>
                 </a:solidFill>
               </a:rPr>
-              <a:t>第9章 快剑如风</a:t>
-            </a:r>
-          </a:p>
-          <a:p>
-            <a:pPr algn="ctr"/>
-            <a:r>
-              <a:rPr sz="2400">
-                <a:solidFill>
-                  <a:srgbClr val="6B5D4D"/>
-                </a:solidFill>
-              </a:rPr>
-              <a:t>排序与二分</a:t>
+              <a:t>第9章</a:t>
             </a:r>
           </a:p>
         </p:txBody>
@@ -3166,8 +3154,8 @@
         </p:nvSpPr>
         <p:spPr>
           <a:xfrm>
-            <a:off x="914400" y="457200"/>
-            <a:ext cx="10058400" cy="914400"/>
+            <a:off x="457200" y="274320"/>
+            <a:ext cx="10972800" cy="731520"/>
           </a:xfrm>
           <a:prstGeom prst="rect">
             <a:avLst/>
@@ -3181,7 +3169,7 @@
           <a:lstStyle/>
           <a:p>
             <a:r>
-              <a:rPr sz="2800" b="1">
+              <a:rPr sz="2400" b="1">
                 <a:solidFill>
                   <a:srgbClr val="8B0000"/>
                 </a:solidFill>
@@ -3199,8 +3187,8 @@
         </p:nvSpPr>
         <p:spPr>
           <a:xfrm>
-            <a:off x="914400" y="1371600"/>
-            <a:ext cx="10058400" cy="4572000"/>
+            <a:off x="457200" y="1097280"/>
+            <a:ext cx="10972800" cy="5029200"/>
           </a:xfrm>
           <a:prstGeom prst="rect">
             <a:avLst/>
@@ -3215,26 +3203,42 @@
           <a:p/>
           <a:p>
             <a:r>
-              <a:rPr sz="1800"/>
-              <a:t>• 快速排序的基本概念与应用</a:t>
-            </a:r>
-          </a:p>
-          <a:p>
-            <a:r>
-              <a:rPr sz="1800"/>
-              <a:t>• 归并排序的基本概念与应用</a:t>
-            </a:r>
-          </a:p>
-          <a:p>
-            <a:r>
-              <a:rPr sz="1800"/>
-              <a:t>• 二分查找的基本概念与应用</a:t>
-            </a:r>
-          </a:p>
-          <a:p>
-            <a:r>
-              <a:rPr sz="1800"/>
-              <a:t>• 浮点二分的基本概念与应用</a:t>
+              <a:rPr sz="1400">
+                <a:solidFill>
+                  <a:srgbClr val="000000"/>
+                </a:solidFill>
+              </a:rPr>
+              <a:t>快速排序：选基准→分区→递归 O(nlogn) 平均</a:t>
+            </a:r>
+          </a:p>
+          <a:p>
+            <a:r>
+              <a:rPr sz="1400">
+                <a:solidFill>
+                  <a:srgbClr val="000000"/>
+                </a:solidFill>
+              </a:rPr>
+              <a:t>归并排序：分而治之→合并有序数组 O(nlogn) 稳定</a:t>
+            </a:r>
+          </a:p>
+          <a:p>
+            <a:r>
+              <a:rPr sz="1400">
+                <a:solidFill>
+                  <a:srgbClr val="000000"/>
+                </a:solidFill>
+              </a:rPr>
+              <a:t>二分查找：有序数组中找目标 O(logn)</a:t>
+            </a:r>
+          </a:p>
+          <a:p>
+            <a:r>
+              <a:rPr sz="1400">
+                <a:solidFill>
+                  <a:srgbClr val="000000"/>
+                </a:solidFill>
+              </a:rPr>
+              <a:t>浮点二分：精度控制 while(r-l&gt;1e-8)</a:t>
             </a:r>
           </a:p>
         </p:txBody>
@@ -3265,8 +3269,8 @@
         </p:nvSpPr>
         <p:spPr>
           <a:xfrm>
-            <a:off x="914400" y="457200"/>
-            <a:ext cx="10058400" cy="914400"/>
+            <a:off x="457200" y="274320"/>
+            <a:ext cx="10972800" cy="731520"/>
           </a:xfrm>
           <a:prstGeom prst="rect">
             <a:avLst/>
@@ -3280,12 +3284,12 @@
           <a:lstStyle/>
           <a:p>
             <a:r>
-              <a:rPr sz="2800" b="1">
+              <a:rPr sz="2400" b="1">
                 <a:solidFill>
                   <a:srgbClr val="8B0000"/>
                 </a:solidFill>
               </a:rPr>
-              <a:t>本章概览</a:t>
+              <a:t>C++ 代码示例</a:t>
             </a:r>
           </a:p>
         </p:txBody>
@@ -3298,8 +3302,8 @@
         </p:nvSpPr>
         <p:spPr>
           <a:xfrm>
-            <a:off x="914400" y="1371600"/>
-            <a:ext cx="10058400" cy="5029200"/>
+            <a:off x="457200" y="1097280"/>
+            <a:ext cx="10972800" cy="5029200"/>
           </a:xfrm>
           <a:prstGeom prst="rect">
             <a:avLst/>
@@ -3314,42 +3318,20 @@
           <a:p/>
           <a:p>
             <a:r>
-              <a:rPr sz="1600">
+              <a:rPr sz="1200">
                 <a:solidFill>
                   <a:srgbClr val="000000"/>
                 </a:solidFill>
               </a:rPr>
-              <a:t>快速排序：选基准，分区，递归 O(nlogn)</a:t>
-            </a:r>
-          </a:p>
-          <a:p>
-            <a:r>
-              <a:rPr sz="1600">
-                <a:solidFill>
-                  <a:srgbClr val="000000"/>
-                </a:solidFill>
-              </a:rPr>
-              <a:t>归并排序：分而治之，合并有序数组 O(nlogn)</a:t>
-            </a:r>
-          </a:p>
-          <a:p>
-            <a:r>
-              <a:rPr sz="1600">
-                <a:solidFill>
-                  <a:srgbClr val="000000"/>
-                </a:solidFill>
-              </a:rPr>
-              <a:t>二分查找：有序数组中找目标 O(logn)</a:t>
-            </a:r>
-          </a:p>
-          <a:p>
-            <a:r>
-              <a:rPr sz="1600">
-                <a:solidFill>
-                  <a:srgbClr val="000000"/>
-                </a:solidFill>
-              </a:rPr>
-              <a:t>浮点二分：精度控制</a:t>
+              <a:t>// 二分查找
+int l = 0, r = n - 1;
+while (l &lt;= r) {
+    int mid = l + (r - l) / 2; // 防溢出
+    if (a[mid] == x) return mid;
+    else if (a[mid] &lt; x) l = mid + 1;
+    else r = mid - 1;
+}
+return -1;</a:t>
             </a:r>
           </a:p>
         </p:txBody>
@@ -3380,8 +3362,8 @@
         </p:nvSpPr>
         <p:spPr>
           <a:xfrm>
-            <a:off x="914400" y="457200"/>
-            <a:ext cx="10058400" cy="914400"/>
+            <a:off x="457200" y="274320"/>
+            <a:ext cx="10972800" cy="731520"/>
           </a:xfrm>
           <a:prstGeom prst="rect">
             <a:avLst/>
@@ -3395,12 +3377,12 @@
           <a:lstStyle/>
           <a:p>
             <a:r>
-              <a:rPr sz="2800" b="1">
+              <a:rPr sz="2400" b="1">
                 <a:solidFill>
                   <a:srgbClr val="8B0000"/>
                 </a:solidFill>
               </a:rPr>
-              <a:t>C++ 代码示例</a:t>
+              <a:t>Python 代码示例</a:t>
             </a:r>
           </a:p>
         </p:txBody>
@@ -3413,8 +3395,8 @@
         </p:nvSpPr>
         <p:spPr>
           <a:xfrm>
-            <a:off x="914400" y="1371600"/>
-            <a:ext cx="10058400" cy="5029200"/>
+            <a:off x="457200" y="1097280"/>
+            <a:ext cx="10972800" cy="5029200"/>
           </a:xfrm>
           <a:prstGeom prst="rect">
             <a:avLst/>
@@ -3429,21 +3411,16 @@
           <a:p/>
           <a:p>
             <a:r>
-              <a:rPr sz="1400">
+              <a:rPr sz="1200">
                 <a:solidFill>
                   <a:srgbClr val="000000"/>
                 </a:solidFill>
               </a:rPr>
-              <a:t>int binary_search(int a[], int n, int x) {
-    int l = 0, r = n-1;
-    while (l &lt;= r) {
-        int mid = (l + r) &gt;&gt; 1;
-        if (a[mid] == x) return mid;
-        else if (a[mid] &lt; x) l = mid + 1;
-        else r = mid - 1;
-    }
-    return -1;
-}</a:t>
+              <a:t>import bisect
+idx = bisect.bisect_left(a, x)
+if idx &lt; len(a) and a[idx] == x:
+    return idx
+return -1</a:t>
             </a:r>
           </a:p>
         </p:txBody>
@@ -3474,8 +3451,8 @@
         </p:nvSpPr>
         <p:spPr>
           <a:xfrm>
-            <a:off x="914400" y="457200"/>
-            <a:ext cx="10058400" cy="914400"/>
+            <a:off x="457200" y="274320"/>
+            <a:ext cx="10972800" cy="731520"/>
           </a:xfrm>
           <a:prstGeom prst="rect">
             <a:avLst/>
@@ -3489,12 +3466,12 @@
           <a:lstStyle/>
           <a:p>
             <a:r>
-              <a:rPr sz="2800" b="1">
+              <a:rPr sz="2400" b="1">
                 <a:solidFill>
                   <a:srgbClr val="8B0000"/>
                 </a:solidFill>
               </a:rPr>
-              <a:t>Python 代码示例</a:t>
+              <a:t>常见错误</a:t>
             </a:r>
           </a:p>
         </p:txBody>
@@ -3507,8 +3484,8 @@
         </p:nvSpPr>
         <p:spPr>
           <a:xfrm>
-            <a:off x="914400" y="1371600"/>
-            <a:ext cx="10058400" cy="5029200"/>
+            <a:off x="457200" y="1097280"/>
+            <a:ext cx="10972800" cy="5029200"/>
           </a:xfrm>
           <a:prstGeom prst="rect">
             <a:avLst/>
@@ -3528,10 +3505,37 @@
                   <a:srgbClr val="000000"/>
                 </a:solidFill>
               </a:rPr>
-              <a:t>import bisect
-idx = bisect.bisect_left(a, x)
-if idx &lt; len(a) and a[idx] == x:
-    return idx</a:t>
+              <a:t>mid = (l+r)/2 可能溢出！用 l+(r-l)/2</a:t>
+            </a:r>
+          </a:p>
+          <a:p>
+            <a:r>
+              <a:rPr sz="1400">
+                <a:solidFill>
+                  <a:srgbClr val="000000"/>
+                </a:solidFill>
+              </a:rPr>
+              <a:t>二分边界：l&lt;=r 还是 l&lt;r？看你用闭区间还是开区间</a:t>
+            </a:r>
+          </a:p>
+          <a:p>
+            <a:r>
+              <a:rPr sz="1400">
+                <a:solidFill>
+                  <a:srgbClr val="000000"/>
+                </a:solidFill>
+              </a:rPr>
+              <a:t>浮点二分精度：while(r-l&gt;1e-8) 不是 1e-6</a:t>
+            </a:r>
+          </a:p>
+          <a:p>
+            <a:r>
+              <a:rPr sz="1400">
+                <a:solidFill>
+                  <a:srgbClr val="000000"/>
+                </a:solidFill>
+              </a:rPr>
+              <a:t>排序稳定性：归并稳定，快排不稳定</a:t>
             </a:r>
           </a:p>
         </p:txBody>
@@ -3562,8 +3566,8 @@
         </p:nvSpPr>
         <p:spPr>
           <a:xfrm>
-            <a:off x="914400" y="457200"/>
-            <a:ext cx="10058400" cy="914400"/>
+            <a:off x="457200" y="274320"/>
+            <a:ext cx="10972800" cy="731520"/>
           </a:xfrm>
           <a:prstGeom prst="rect">
             <a:avLst/>
@@ -3577,12 +3581,12 @@
           <a:lstStyle/>
           <a:p>
             <a:r>
-              <a:rPr sz="2800" b="1">
+              <a:rPr sz="2400" b="1">
                 <a:solidFill>
                   <a:srgbClr val="8B0000"/>
                 </a:solidFill>
               </a:rPr>
-              <a:t>常见错误</a:t>
+              <a:t>练习题目</a:t>
             </a:r>
           </a:p>
         </p:txBody>
@@ -3595,8 +3599,8 @@
         </p:nvSpPr>
         <p:spPr>
           <a:xfrm>
-            <a:off x="914400" y="1371600"/>
-            <a:ext cx="10058400" cy="5029200"/>
+            <a:off x="457200" y="1097280"/>
+            <a:ext cx="10972800" cy="5029200"/>
           </a:xfrm>
           <a:prstGeom prst="rect">
             <a:avLst/>
@@ -3611,42 +3615,32 @@
           <a:p/>
           <a:p>
             <a:r>
-              <a:rPr sz="1600">
+              <a:rPr sz="1400">
                 <a:solidFill>
                   <a:srgbClr val="000000"/>
                 </a:solidFill>
               </a:rPr>
-              <a:t>mid = (l+r)/2 可能溢出</a:t>
-            </a:r>
-          </a:p>
-          <a:p>
-            <a:r>
-              <a:rPr sz="1600">
+              <a:t>JD103 快剑排序 - 快速排序 (Medium)</a:t>
+            </a:r>
+          </a:p>
+          <a:p>
+            <a:r>
+              <a:rPr sz="1400">
                 <a:solidFill>
                   <a:srgbClr val="000000"/>
                 </a:solidFill>
               </a:rPr>
-              <a:t>二分边界：l&lt;r vs l&lt;=r</a:t>
-            </a:r>
-          </a:p>
-          <a:p>
-            <a:r>
-              <a:rPr sz="1600">
+              <a:t>JD107 石壁听风 - 二分查找 (Medium)</a:t>
+            </a:r>
+          </a:p>
+          <a:p>
+            <a:r>
+              <a:rPr sz="1400">
                 <a:solidFill>
                   <a:srgbClr val="000000"/>
                 </a:solidFill>
               </a:rPr>
-              <a:t>浮点二分精度：while(r-l&gt;1e-8)</a:t>
-            </a:r>
-          </a:p>
-          <a:p>
-            <a:r>
-              <a:rPr sz="1600">
-                <a:solidFill>
-                  <a:srgbClr val="000000"/>
-                </a:solidFill>
-              </a:rPr>
-              <a:t>排序稳定性区别</a:t>
+              <a:t>JD108 剑指方根 - 浮点二分 (Medium)</a:t>
             </a:r>
           </a:p>
         </p:txBody>
@@ -3677,8 +3671,8 @@
         </p:nvSpPr>
         <p:spPr>
           <a:xfrm>
-            <a:off x="914400" y="457200"/>
-            <a:ext cx="10058400" cy="914400"/>
+            <a:off x="457200" y="274320"/>
+            <a:ext cx="10972800" cy="731520"/>
           </a:xfrm>
           <a:prstGeom prst="rect">
             <a:avLst/>
@@ -3692,12 +3686,12 @@
           <a:lstStyle/>
           <a:p>
             <a:r>
-              <a:rPr sz="2800" b="1">
+              <a:rPr sz="2400" b="1">
                 <a:solidFill>
                   <a:srgbClr val="8B0000"/>
                 </a:solidFill>
               </a:rPr>
-              <a:t>练习题目</a:t>
+              <a:t>本章小结</a:t>
             </a:r>
           </a:p>
         </p:txBody>
@@ -3710,8 +3704,8 @@
         </p:nvSpPr>
         <p:spPr>
           <a:xfrm>
-            <a:off x="914400" y="1371600"/>
-            <a:ext cx="10058400" cy="5029200"/>
+            <a:off x="457200" y="1097280"/>
+            <a:ext cx="10972800" cy="5029200"/>
           </a:xfrm>
           <a:prstGeom prst="rect">
             <a:avLst/>
@@ -3726,147 +3720,42 @@
           <a:p/>
           <a:p>
             <a:r>
-              <a:rPr sz="1600">
+              <a:rPr sz="1400">
                 <a:solidFill>
                   <a:srgbClr val="000000"/>
                 </a:solidFill>
               </a:rPr>
-              <a:t>JD103 快剑排序</a:t>
-            </a:r>
-          </a:p>
-          <a:p>
-            <a:r>
-              <a:rPr sz="1600">
+              <a:t>本章学习了第9章的核心概念</a:t>
+            </a:r>
+          </a:p>
+          <a:p>
+            <a:r>
+              <a:rPr sz="1400">
                 <a:solidFill>
                   <a:srgbClr val="000000"/>
                 </a:solidFill>
               </a:rPr>
-              <a:t>JD107 石壁听风</a:t>
-            </a:r>
-          </a:p>
-          <a:p>
-            <a:r>
-              <a:rPr sz="1600">
+              <a:t>多做练习是掌握算法的关键</a:t>
+            </a:r>
+          </a:p>
+          <a:p>
+            <a:r>
+              <a:rPr sz="1400">
                 <a:solidFill>
                   <a:srgbClr val="000000"/>
                 </a:solidFill>
               </a:rPr>
-              <a:t>JD108 剑指方根</a:t>
-            </a:r>
-          </a:p>
-        </p:txBody>
-      </p:sp>
-    </p:spTree>
-  </p:cSld>
-  <p:clrMapOvr>
-    <a:masterClrMapping/>
-  </p:clrMapOvr>
-</p:sld>
-</file>
-
-<file path=ppt/slides/slide8.xml><?xml version="1.0" encoding="utf-8"?>
-<p:sld xmlns:a="http://schemas.openxmlformats.org/drawingml/2006/main" xmlns:p="http://schemas.openxmlformats.org/presentationml/2006/main" xmlns:r="http://schemas.openxmlformats.org/officeDocument/2006/relationships">
-  <p:cSld>
-    <p:spTree>
-      <p:nvGrpSpPr>
-        <p:cNvPr id="1" name=""/>
-        <p:cNvGrpSpPr/>
-        <p:nvPr/>
-      </p:nvGrpSpPr>
-      <p:grpSpPr/>
-      <p:sp>
-        <p:nvSpPr>
-          <p:cNvPr id="2" name="TextBox 1"/>
-          <p:cNvSpPr txBox="1"/>
-          <p:nvPr/>
-        </p:nvSpPr>
-        <p:spPr>
-          <a:xfrm>
-            <a:off x="914400" y="457200"/>
-            <a:ext cx="10058400" cy="914400"/>
-          </a:xfrm>
-          <a:prstGeom prst="rect">
-            <a:avLst/>
-          </a:prstGeom>
-          <a:noFill/>
-        </p:spPr>
-        <p:txBody>
-          <a:bodyPr wrap="none">
-            <a:spAutoFit/>
-          </a:bodyPr>
-          <a:lstStyle/>
-          <a:p>
-            <a:r>
-              <a:rPr sz="2800" b="1">
-                <a:solidFill>
-                  <a:srgbClr val="8B0000"/>
+              <a:t>理解算法思想比死记代码更重要</a:t>
+            </a:r>
+          </a:p>
+          <a:p>
+            <a:r>
+              <a:rPr sz="1400">
+                <a:solidFill>
+                  <a:srgbClr val="000000"/>
                 </a:solidFill>
               </a:rPr>
-              <a:t>本章小结</a:t>
-            </a:r>
-          </a:p>
-        </p:txBody>
-      </p:sp>
-      <p:sp>
-        <p:nvSpPr>
-          <p:cNvPr id="3" name="TextBox 2"/>
-          <p:cNvSpPr txBox="1"/>
-          <p:nvPr/>
-        </p:nvSpPr>
-        <p:spPr>
-          <a:xfrm>
-            <a:off x="914400" y="1371600"/>
-            <a:ext cx="10058400" cy="5029200"/>
-          </a:xfrm>
-          <a:prstGeom prst="rect">
-            <a:avLst/>
-          </a:prstGeom>
-          <a:noFill/>
-        </p:spPr>
-        <p:txBody>
-          <a:bodyPr wrap="none">
-            <a:spAutoFit/>
-          </a:bodyPr>
-          <a:lstStyle/>
-          <a:p/>
-          <a:p>
-            <a:r>
-              <a:rPr sz="1600">
-                <a:solidFill>
-                  <a:srgbClr val="000000"/>
-                </a:solidFill>
-              </a:rPr>
-              <a:t>掌握核心概念</a:t>
-            </a:r>
-          </a:p>
-          <a:p>
-            <a:r>
-              <a:rPr sz="1600">
-                <a:solidFill>
-                  <a:srgbClr val="000000"/>
-                </a:solidFill>
-              </a:rPr>
-              <a:t>多做练习</a:t>
-            </a:r>
-          </a:p>
-          <a:p>
-            <a:r>
-              <a:rPr sz="1600">
-                <a:solidFill>
-                  <a:srgbClr val="000000"/>
-                </a:solidFill>
-              </a:rPr>
-              <a:t>注意边界条件</a:t>
-            </a:r>
-          </a:p>
-          <a:p>
-            <a:r>
-              <a:rPr sz="1600">
-                <a:solidFill>
-                  <a:srgbClr val="000000"/>
-                </a:solidFill>
-              </a:rPr>
-              <a:t>理解算法思想而非死记代码</a:t>
+              <a:t>遇到问题先画图、再想算法、最后写代码</a:t>
             </a:r>
           </a:p>
         </p:txBody>

--- a/textbook/ppt/chapter09_ppt.pptx
+++ b/textbook/ppt/chapter09_ppt.pptx
@@ -12,6 +12,7 @@
     <p:sldId id="260" r:id="rId11"/>
     <p:sldId id="261" r:id="rId12"/>
     <p:sldId id="262" r:id="rId13"/>
+    <p:sldId id="263" r:id="rId14"/>
   </p:sldIdLst>
   <p:sldSz cx="12188952" cy="6858000" type="screen4x3"/>
   <p:notesSz cx="6858000" cy="9144000"/>
@@ -3620,7 +3621,7 @@
                   <a:srgbClr val="000000"/>
                 </a:solidFill>
               </a:rPr>
-              <a:t>JD103 快剑排序 - 快速排序 (Medium)</a:t>
+              <a:t>JD103 立桩定阵 - 快速排序 (Medium)</a:t>
             </a:r>
           </a:p>
           <a:p>
@@ -3756,6 +3757,91 @@
                 </a:solidFill>
               </a:rPr>
               <a:t>遇到问题先画图、再想算法、最后写代码</a:t>
+            </a:r>
+          </a:p>
+        </p:txBody>
+      </p:sp>
+    </p:spTree>
+  </p:cSld>
+  <p:clrMapOvr>
+    <a:masterClrMapping/>
+  </p:clrMapOvr>
+</p:sld>
+</file>
+
+<file path=ppt/slides/slide8.xml><?xml version="1.0" encoding="utf-8"?>
+<p:sld xmlns:a="http://schemas.openxmlformats.org/drawingml/2006/main" xmlns:p="http://schemas.openxmlformats.org/presentationml/2006/main" xmlns:r="http://schemas.openxmlformats.org/officeDocument/2006/relationships">
+  <p:cSld>
+    <p:spTree>
+      <p:nvGrpSpPr>
+        <p:cNvPr id="1" name=""/>
+        <p:cNvGrpSpPr/>
+        <p:nvPr/>
+      </p:nvGrpSpPr>
+      <p:grpSpPr/>
+      <p:sp>
+        <p:nvSpPr>
+          <p:cNvPr id="2" name="TextBox 1"/>
+          <p:cNvSpPr txBox="1"/>
+          <p:nvPr/>
+        </p:nvSpPr>
+        <p:spPr>
+          <a:xfrm>
+            <a:off x="457200" y="274320"/>
+            <a:ext cx="10972800" cy="731520"/>
+          </a:xfrm>
+          <a:prstGeom prst="rect">
+            <a:avLst/>
+          </a:prstGeom>
+          <a:noFill/>
+        </p:spPr>
+        <p:txBody>
+          <a:bodyPr wrap="none">
+            <a:spAutoFit/>
+          </a:bodyPr>
+          <a:lstStyle/>
+          <a:p>
+            <a:r>
+              <a:rPr sz="2400" b="1">
+                <a:solidFill>
+                  <a:srgbClr val="8B0000"/>
+                </a:solidFill>
+              </a:rPr>
+              <a:t>本章概览</a:t>
+            </a:r>
+          </a:p>
+        </p:txBody>
+      </p:sp>
+      <p:sp>
+        <p:nvSpPr>
+          <p:cNvPr id="3" name="TextBox 2"/>
+          <p:cNvSpPr txBox="1"/>
+          <p:nvPr/>
+        </p:nvSpPr>
+        <p:spPr>
+          <a:xfrm>
+            <a:off x="457200" y="1097280"/>
+            <a:ext cx="10972800" cy="5029200"/>
+          </a:xfrm>
+          <a:prstGeom prst="rect">
+            <a:avLst/>
+          </a:prstGeom>
+          <a:noFill/>
+        </p:spPr>
+        <p:txBody>
+          <a:bodyPr wrap="none">
+            <a:spAutoFit/>
+          </a:bodyPr>
+          <a:lstStyle/>
+          <a:p/>
+          <a:p>
+            <a:r>
+              <a:rPr sz="1600">
+                <a:solidFill>
+                  <a:srgbClr val="000000"/>
+                </a:solidFill>
+              </a:rPr>
+              <a:t>本章学习排序和二分——快速排序、归并排序、二分查找是算法基础。</a:t>
             </a:r>
           </a:p>
         </p:txBody>

--- a/textbook/ppt/chapter09_ppt.pptx
+++ b/textbook/ppt/chapter09_ppt.pptx
@@ -13,6 +13,7 @@
     <p:sldId id="261" r:id="rId12"/>
     <p:sldId id="262" r:id="rId13"/>
     <p:sldId id="263" r:id="rId14"/>
+    <p:sldId id="264" r:id="rId15"/>
   </p:sldIdLst>
   <p:sldSz cx="12188952" cy="6858000" type="screen4x3"/>
   <p:notesSz cx="6858000" cy="9144000"/>
@@ -3726,7 +3727,7 @@
                   <a:srgbClr val="000000"/>
                 </a:solidFill>
               </a:rPr>
-              <a:t>本章学习了第9章的核心概念</a:t>
+              <a:t/>
             </a:r>
           </a:p>
           <a:p>
@@ -3736,7 +3737,7 @@
                   <a:srgbClr val="000000"/>
                 </a:solidFill>
               </a:rPr>
-              <a:t>多做练习是掌握算法的关键</a:t>
+              <a:t/>
             </a:r>
           </a:p>
           <a:p>
@@ -3746,7 +3747,7 @@
                   <a:srgbClr val="000000"/>
                 </a:solidFill>
               </a:rPr>
-              <a:t>理解算法思想比死记代码更重要</a:t>
+              <a:t/>
             </a:r>
           </a:p>
           <a:p>
@@ -3756,7 +3757,7 @@
                   <a:srgbClr val="000000"/>
                 </a:solidFill>
               </a:rPr>
-              <a:t>遇到问题先画图、再想算法、最后写代码</a:t>
+              <a:t/>
             </a:r>
           </a:p>
         </p:txBody>
@@ -3842,6 +3843,121 @@
                 </a:solidFill>
               </a:rPr>
               <a:t>本章学习排序和二分——快速排序、归并排序、二分查找是算法基础。</a:t>
+            </a:r>
+          </a:p>
+        </p:txBody>
+      </p:sp>
+    </p:spTree>
+  </p:cSld>
+  <p:clrMapOvr>
+    <a:masterClrMapping/>
+  </p:clrMapOvr>
+</p:sld>
+</file>
+
+<file path=ppt/slides/slide9.xml><?xml version="1.0" encoding="utf-8"?>
+<p:sld xmlns:a="http://schemas.openxmlformats.org/drawingml/2006/main" xmlns:p="http://schemas.openxmlformats.org/presentationml/2006/main" xmlns:r="http://schemas.openxmlformats.org/officeDocument/2006/relationships">
+  <p:cSld>
+    <p:spTree>
+      <p:nvGrpSpPr>
+        <p:cNvPr id="1" name=""/>
+        <p:cNvGrpSpPr/>
+        <p:nvPr/>
+      </p:nvGrpSpPr>
+      <p:grpSpPr/>
+      <p:sp>
+        <p:nvSpPr>
+          <p:cNvPr id="2" name="TextBox 1"/>
+          <p:cNvSpPr txBox="1"/>
+          <p:nvPr/>
+        </p:nvSpPr>
+        <p:spPr>
+          <a:xfrm>
+            <a:off x="457200" y="274320"/>
+            <a:ext cx="10972800" cy="731520"/>
+          </a:xfrm>
+          <a:prstGeom prst="rect">
+            <a:avLst/>
+          </a:prstGeom>
+          <a:noFill/>
+        </p:spPr>
+        <p:txBody>
+          <a:bodyPr wrap="none">
+            <a:spAutoFit/>
+          </a:bodyPr>
+          <a:lstStyle/>
+          <a:p>
+            <a:r>
+              <a:rPr sz="2400" b="1">
+                <a:solidFill>
+                  <a:srgbClr val="8B0000"/>
+                </a:solidFill>
+              </a:rPr>
+              <a:t>第9章 核心要点</a:t>
+            </a:r>
+          </a:p>
+        </p:txBody>
+      </p:sp>
+      <p:sp>
+        <p:nvSpPr>
+          <p:cNvPr id="3" name="TextBox 2"/>
+          <p:cNvSpPr txBox="1"/>
+          <p:nvPr/>
+        </p:nvSpPr>
+        <p:spPr>
+          <a:xfrm>
+            <a:off x="457200" y="1097280"/>
+            <a:ext cx="10972800" cy="5029200"/>
+          </a:xfrm>
+          <a:prstGeom prst="rect">
+            <a:avLst/>
+          </a:prstGeom>
+          <a:noFill/>
+        </p:spPr>
+        <p:txBody>
+          <a:bodyPr wrap="none">
+            <a:spAutoFit/>
+          </a:bodyPr>
+          <a:lstStyle/>
+          <a:p/>
+          <a:p>
+            <a:r>
+              <a:rPr sz="1600">
+                <a:solidFill>
+                  <a:srgbClr val="000000"/>
+                </a:solidFill>
+              </a:rPr>
+              <a:t>• 快速排序的分区思想</a:t>
+            </a:r>
+          </a:p>
+          <a:p>
+            <a:r>
+              <a:rPr sz="1600">
+                <a:solidFill>
+                  <a:srgbClr val="000000"/>
+                </a:solidFill>
+              </a:rPr>
+              <a:t>• 归并排序的合并过程</a:t>
+            </a:r>
+          </a:p>
+          <a:p>
+            <a:r>
+              <a:rPr sz="1600">
+                <a:solidFill>
+                  <a:srgbClr val="000000"/>
+                </a:solidFill>
+              </a:rPr>
+              <a:t>• 二分查找的边界处理</a:t>
+            </a:r>
+          </a:p>
+          <a:p>
+            <a:r>
+              <a:rPr sz="1600">
+                <a:solidFill>
+                  <a:srgbClr val="000000"/>
+                </a:solidFill>
+              </a:rPr>
+              <a:t>• 排序稳定性的影响</a:t>
             </a:r>
           </a:p>
         </p:txBody>
